--- a/Capstone Project Presentation.pptx
+++ b/Capstone Project Presentation.pptx
@@ -518,6 +518,13 @@
           </p:nvPr>
         </p:nvSpPr>
         <p:spPr/>
+        <p:txBody>
+          <a:bodyPr/>
+          <a:lstStyle/>
+          <a:p>
+            <a:endParaRPr lang="en-US"/>
+          </a:p>
+        </p:txBody>
       </p:sp>
       <p:sp>
         <p:nvSpPr>
@@ -602,6 +609,13 @@
           </p:nvPr>
         </p:nvSpPr>
         <p:spPr/>
+        <p:txBody>
+          <a:bodyPr/>
+          <a:lstStyle/>
+          <a:p>
+            <a:endParaRPr lang="en-US"/>
+          </a:p>
+        </p:txBody>
       </p:sp>
       <p:sp>
         <p:nvSpPr>
@@ -9647,7 +9661,7 @@
         </p:nvSpPr>
         <p:spPr>
           <a:xfrm>
-            <a:off x="598803" y="796125"/>
+            <a:off x="666179" y="845971"/>
             <a:ext cx="2281556" cy="1569660"/>
           </a:xfrm>
           <a:prstGeom prst="rect">
@@ -9829,7 +9843,7 @@
           <a:lstStyle/>
           <a:p>
             <a:r>
-              <a:rPr sz="1400" b="1" i="0" dirty="0" err="1">
+              <a:rPr sz="1400" b="1" i="0" dirty="0">
                 <a:solidFill>
                   <a:srgbClr val="00B8D4"/>
                 </a:solidFill>
@@ -10454,22 +10468,13 @@
               </a:lnSpc>
             </a:pPr>
             <a:r>
-              <a:rPr sz="1333" dirty="0" err="1">
+              <a:rPr sz="1333" dirty="0">
                 <a:solidFill>
                   <a:srgbClr val="F0F8F5"/>
                 </a:solidFill>
                 <a:latin typeface="Candara" panose="020E0502030303020204" pitchFamily="34" charset="0"/>
               </a:rPr>
-              <a:t>SignalR</a:t>
-            </a:r>
-            <a:r>
-              <a:rPr sz="1333" dirty="0">
-                <a:solidFill>
-                  <a:srgbClr val="F0F8F5"/>
-                </a:solidFill>
-                <a:latin typeface="Candara" panose="020E0502030303020204" pitchFamily="34" charset="0"/>
-              </a:rPr>
-              <a:t> WebSocket pushes live sensor data</a:t>
+              <a:t>SignalR WebSocket pushes live sensor data</a:t>
             </a:r>
           </a:p>
           <a:p>
@@ -10719,23 +10724,8 @@
                 </a:solidFill>
                 <a:latin typeface="Candara" panose="020E0502030303020204" pitchFamily="34" charset="0"/>
               </a:rPr>
-              <a:t>Real-time alerts via </a:t>
-            </a:r>
-            <a:r>
-              <a:rPr sz="1333" dirty="0" err="1">
-                <a:solidFill>
-                  <a:srgbClr val="F0F8F5"/>
-                </a:solidFill>
-                <a:latin typeface="Candara" panose="020E0502030303020204" pitchFamily="34" charset="0"/>
-              </a:rPr>
-              <a:t>SignalR</a:t>
-            </a:r>
-            <a:endParaRPr sz="1333" dirty="0">
-              <a:solidFill>
-                <a:srgbClr val="F0F8F5"/>
-              </a:solidFill>
-              <a:latin typeface="Candara" panose="020E0502030303020204" pitchFamily="34" charset="0"/>
-            </a:endParaRPr>
+              <a:t>Real-time alerts via SignalR</a:t>
+            </a:r>
           </a:p>
           <a:p>
             <a:pPr defTabSz="380893">
@@ -10916,7 +10906,7 @@
               </a:lnSpc>
             </a:pPr>
             <a:r>
-              <a:rPr sz="1333" b="1">
+              <a:rPr sz="1333" b="1" dirty="0">
                 <a:solidFill>
                   <a:srgbClr val="00C896"/>
                 </a:solidFill>
@@ -11212,7 +11202,7 @@
         <p:spPr>
           <a:xfrm>
             <a:off x="612648" y="2633472"/>
-            <a:ext cx="1993391" cy="523220"/>
+            <a:ext cx="1993391" cy="307777"/>
           </a:xfrm>
           <a:prstGeom prst="rect">
             <a:avLst/>
@@ -11227,14 +11217,22 @@
           <a:p>
             <a:pPr algn="ctr"/>
             <a:r>
-              <a:rPr sz="1400" b="1" i="0">
+              <a:rPr lang="en-US" sz="1400" b="1" i="0" dirty="0">
                 <a:solidFill>
                   <a:srgbClr val="00C896"/>
                 </a:solidFill>
                 <a:latin typeface="Candara" panose="020E0502030303020204" pitchFamily="34" charset="0"/>
               </a:rPr>
-              <a:t>ESP32
-Edge Device</a:t>
+              <a:t>Edg</a:t>
+            </a:r>
+            <a:r>
+              <a:rPr sz="1400" b="1" i="0" dirty="0">
+                <a:solidFill>
+                  <a:srgbClr val="00C896"/>
+                </a:solidFill>
+                <a:latin typeface="Candara" panose="020E0502030303020204" pitchFamily="34" charset="0"/>
+              </a:rPr>
+              <a:t>e Device</a:t>
             </a:r>
           </a:p>
         </p:txBody>
@@ -11263,7 +11261,7 @@
           <a:p>
             <a:pPr algn="ctr"/>
             <a:r>
-              <a:rPr sz="1400" b="0" i="0">
+              <a:rPr sz="1400" b="0" i="0" dirty="0">
                 <a:solidFill>
                   <a:srgbClr val="9EC4AE"/>
                 </a:solidFill>
@@ -11581,7 +11579,7 @@
           <a:p>
             <a:pPr algn="ctr"/>
             <a:r>
-              <a:rPr sz="1400" b="1" i="0">
+              <a:rPr sz="1400" b="1" i="0" dirty="0">
                 <a:solidFill>
                   <a:srgbClr val="F0A500"/>
                 </a:solidFill>
@@ -14621,25 +14619,7 @@
                 </a:solidFill>
                 <a:latin typeface="Candara" panose="020E0502030303020204" pitchFamily="34" charset="0"/>
               </a:rPr>
-              <a:t>Solution:    </a:t>
-            </a:r>
-            <a:r>
-              <a:rPr sz="1600" b="0" i="0" dirty="0" err="1">
-                <a:solidFill>
-                  <a:srgbClr val="E8F5EE"/>
-                </a:solidFill>
-                <a:latin typeface="Candara" panose="020E0502030303020204" pitchFamily="34" charset="0"/>
-              </a:rPr>
-              <a:t>SignalR</a:t>
-            </a:r>
-            <a:r>
-              <a:rPr sz="1600" b="0" i="0" dirty="0">
-                <a:solidFill>
-                  <a:srgbClr val="E8F5EE"/>
-                </a:solidFill>
-                <a:latin typeface="Candara" panose="020E0502030303020204" pitchFamily="34" charset="0"/>
-              </a:rPr>
-              <a:t> WebSocket hub with device-group subscriptions. Server pushes to groups on data receipt.</a:t>
+              <a:t>Solution:    SignalR WebSocket hub with device-group subscriptions. Server pushes to groups on data receipt.</a:t>
             </a:r>
           </a:p>
         </p:txBody>
@@ -15026,7 +15006,7 @@
           <a:p>
             <a:pPr algn="l"/>
             <a:r>
-              <a:rPr sz="1600" b="0" i="0">
+              <a:rPr sz="1600" b="0" i="0" dirty="0">
                 <a:solidFill>
                   <a:srgbClr val="9EC4AE"/>
                 </a:solidFill>
@@ -15063,7 +15043,7 @@
           <a:p>
             <a:pPr algn="l"/>
             <a:r>
-              <a:rPr sz="1600" b="0" i="0">
+              <a:rPr sz="1600" b="0" i="0" dirty="0">
                 <a:solidFill>
                   <a:srgbClr val="E8F5EE"/>
                 </a:solidFill>
@@ -15306,98 +15286,6 @@
       </p:grpSpPr>
       <p:sp>
         <p:nvSpPr>
-          <p:cNvPr id="2" name="Rectangle 1"/>
-          <p:cNvSpPr/>
-          <p:nvPr/>
-        </p:nvSpPr>
-        <p:spPr>
-          <a:xfrm>
-            <a:off x="0" y="0"/>
-            <a:ext cx="12188952" cy="50292"/>
-          </a:xfrm>
-          <a:prstGeom prst="rect">
-            <a:avLst/>
-          </a:prstGeom>
-          <a:solidFill>
-            <a:srgbClr val="00C896"/>
-          </a:solidFill>
-          <a:ln>
-            <a:noFill/>
-          </a:ln>
-        </p:spPr>
-        <p:style>
-          <a:lnRef idx="1">
-            <a:schemeClr val="accent1"/>
-          </a:lnRef>
-          <a:fillRef idx="3">
-            <a:schemeClr val="accent1"/>
-          </a:fillRef>
-          <a:effectRef idx="2">
-            <a:schemeClr val="accent1"/>
-          </a:effectRef>
-          <a:fontRef idx="minor">
-            <a:schemeClr val="lt1"/>
-          </a:fontRef>
-        </p:style>
-        <p:txBody>
-          <a:bodyPr rtlCol="0" anchor="ctr"/>
-          <a:lstStyle/>
-          <a:p>
-            <a:pPr algn="ctr"/>
-            <a:endParaRPr sz="1600">
-              <a:latin typeface="Candara" panose="020E0502030303020204" pitchFamily="34" charset="0"/>
-            </a:endParaRPr>
-          </a:p>
-        </p:txBody>
-      </p:sp>
-      <p:sp>
-        <p:nvSpPr>
-          <p:cNvPr id="3" name="Rectangle 2"/>
-          <p:cNvSpPr/>
-          <p:nvPr/>
-        </p:nvSpPr>
-        <p:spPr>
-          <a:xfrm>
-            <a:off x="0" y="0"/>
-            <a:ext cx="54864" cy="6858000"/>
-          </a:xfrm>
-          <a:prstGeom prst="rect">
-            <a:avLst/>
-          </a:prstGeom>
-          <a:solidFill>
-            <a:srgbClr val="00C896"/>
-          </a:solidFill>
-          <a:ln>
-            <a:noFill/>
-          </a:ln>
-        </p:spPr>
-        <p:style>
-          <a:lnRef idx="1">
-            <a:schemeClr val="accent1"/>
-          </a:lnRef>
-          <a:fillRef idx="3">
-            <a:schemeClr val="accent1"/>
-          </a:fillRef>
-          <a:effectRef idx="2">
-            <a:schemeClr val="accent1"/>
-          </a:effectRef>
-          <a:fontRef idx="minor">
-            <a:schemeClr val="lt1"/>
-          </a:fontRef>
-        </p:style>
-        <p:txBody>
-          <a:bodyPr rtlCol="0" anchor="ctr"/>
-          <a:lstStyle/>
-          <a:p>
-            <a:pPr algn="ctr"/>
-            <a:endParaRPr sz="1600">
-              <a:latin typeface="Candara" panose="020E0502030303020204" pitchFamily="34" charset="0"/>
-            </a:endParaRPr>
-          </a:p>
-        </p:txBody>
-      </p:sp>
-      <p:sp>
-        <p:nvSpPr>
           <p:cNvPr id="4" name="TextBox 3"/>
           <p:cNvSpPr txBox="1"/>
           <p:nvPr/>
@@ -15503,52 +15391,6 @@
       </p:sp>
       <p:sp>
         <p:nvSpPr>
-          <p:cNvPr id="11" name="Rectangle 10"/>
-          <p:cNvSpPr/>
-          <p:nvPr/>
-        </p:nvSpPr>
-        <p:spPr>
-          <a:xfrm>
-            <a:off x="804672" y="1737360"/>
-            <a:ext cx="4846320" cy="36576"/>
-          </a:xfrm>
-          <a:prstGeom prst="rect">
-            <a:avLst/>
-          </a:prstGeom>
-          <a:solidFill>
-            <a:srgbClr val="009A72"/>
-          </a:solidFill>
-          <a:ln>
-            <a:noFill/>
-          </a:ln>
-        </p:spPr>
-        <p:style>
-          <a:lnRef idx="1">
-            <a:schemeClr val="accent1"/>
-          </a:lnRef>
-          <a:fillRef idx="3">
-            <a:schemeClr val="accent1"/>
-          </a:fillRef>
-          <a:effectRef idx="2">
-            <a:schemeClr val="accent1"/>
-          </a:effectRef>
-          <a:fontRef idx="minor">
-            <a:schemeClr val="lt1"/>
-          </a:fontRef>
-        </p:style>
-        <p:txBody>
-          <a:bodyPr rtlCol="0" anchor="ctr"/>
-          <a:lstStyle/>
-          <a:p>
-            <a:pPr algn="ctr"/>
-            <a:endParaRPr sz="1400">
-              <a:latin typeface="Candara" panose="020E0502030303020204" pitchFamily="34" charset="0"/>
-            </a:endParaRPr>
-          </a:p>
-        </p:txBody>
-      </p:sp>
-      <p:sp>
-        <p:nvSpPr>
           <p:cNvPr id="12" name="TextBox 11"/>
           <p:cNvSpPr txBox="1"/>
           <p:nvPr/>
@@ -15676,7 +15518,7 @@
           <a:p>
             <a:pPr algn="l"/>
             <a:r>
-              <a:rPr sz="1400" b="0" i="0">
+              <a:rPr sz="1400" b="0" i="0" dirty="0">
                 <a:solidFill>
                   <a:srgbClr val="9EC4AE"/>
                 </a:solidFill>
@@ -15794,52 +15636,6 @@
       </p:sp>
       <p:sp>
         <p:nvSpPr>
-          <p:cNvPr id="20" name="Rectangle 19"/>
-          <p:cNvSpPr/>
-          <p:nvPr/>
-        </p:nvSpPr>
-        <p:spPr>
-          <a:xfrm>
-            <a:off x="6446520" y="1234440"/>
-            <a:ext cx="5422392" cy="64008"/>
-          </a:xfrm>
-          <a:prstGeom prst="rect">
-            <a:avLst/>
-          </a:prstGeom>
-          <a:solidFill>
-            <a:srgbClr val="00B8D4"/>
-          </a:solidFill>
-          <a:ln>
-            <a:noFill/>
-          </a:ln>
-        </p:spPr>
-        <p:style>
-          <a:lnRef idx="1">
-            <a:schemeClr val="accent1"/>
-          </a:lnRef>
-          <a:fillRef idx="3">
-            <a:schemeClr val="accent1"/>
-          </a:fillRef>
-          <a:effectRef idx="2">
-            <a:schemeClr val="accent1"/>
-          </a:effectRef>
-          <a:fontRef idx="minor">
-            <a:schemeClr val="lt1"/>
-          </a:fontRef>
-        </p:style>
-        <p:txBody>
-          <a:bodyPr rtlCol="0" anchor="ctr"/>
-          <a:lstStyle/>
-          <a:p>
-            <a:pPr algn="ctr"/>
-            <a:endParaRPr sz="1400">
-              <a:latin typeface="Candara" panose="020E0502030303020204" pitchFamily="34" charset="0"/>
-            </a:endParaRPr>
-          </a:p>
-        </p:txBody>
-      </p:sp>
-      <p:sp>
-        <p:nvSpPr>
           <p:cNvPr id="21" name="TextBox 20"/>
           <p:cNvSpPr txBox="1"/>
           <p:nvPr/>
@@ -15932,7 +15728,7 @@
           <a:p>
             <a:pPr algn="l"/>
             <a:r>
-              <a:rPr sz="1400" b="0" i="0">
+              <a:rPr sz="1400" b="0" i="0" dirty="0">
                 <a:solidFill>
                   <a:srgbClr val="9EC4AE"/>
                 </a:solidFill>
@@ -16015,52 +15811,6 @@
       </p:sp>
       <p:sp>
         <p:nvSpPr>
-          <p:cNvPr id="27" name="Rectangle 26"/>
-          <p:cNvSpPr/>
-          <p:nvPr/>
-        </p:nvSpPr>
-        <p:spPr>
-          <a:xfrm>
-            <a:off x="6446520" y="3593592"/>
-            <a:ext cx="5422392" cy="64008"/>
-          </a:xfrm>
-          <a:prstGeom prst="rect">
-            <a:avLst/>
-          </a:prstGeom>
-          <a:solidFill>
-            <a:srgbClr val="F0A500"/>
-          </a:solidFill>
-          <a:ln>
-            <a:noFill/>
-          </a:ln>
-        </p:spPr>
-        <p:style>
-          <a:lnRef idx="1">
-            <a:schemeClr val="accent1"/>
-          </a:lnRef>
-          <a:fillRef idx="3">
-            <a:schemeClr val="accent1"/>
-          </a:fillRef>
-          <a:effectRef idx="2">
-            <a:schemeClr val="accent1"/>
-          </a:effectRef>
-          <a:fontRef idx="minor">
-            <a:schemeClr val="lt1"/>
-          </a:fontRef>
-        </p:style>
-        <p:txBody>
-          <a:bodyPr rtlCol="0" anchor="ctr"/>
-          <a:lstStyle/>
-          <a:p>
-            <a:pPr algn="ctr"/>
-            <a:endParaRPr sz="1400">
-              <a:latin typeface="Candara" panose="020E0502030303020204" pitchFamily="34" charset="0"/>
-            </a:endParaRPr>
-          </a:p>
-        </p:txBody>
-      </p:sp>
-      <p:sp>
-        <p:nvSpPr>
           <p:cNvPr id="28" name="TextBox 27"/>
           <p:cNvSpPr txBox="1"/>
           <p:nvPr/>
@@ -16250,52 +16000,6 @@
           </a:prstGeom>
           <a:solidFill>
             <a:srgbClr val="003D2E"/>
-          </a:solidFill>
-          <a:ln>
-            <a:noFill/>
-          </a:ln>
-        </p:spPr>
-        <p:style>
-          <a:lnRef idx="1">
-            <a:schemeClr val="accent1"/>
-          </a:lnRef>
-          <a:fillRef idx="3">
-            <a:schemeClr val="accent1"/>
-          </a:fillRef>
-          <a:effectRef idx="2">
-            <a:schemeClr val="accent1"/>
-          </a:effectRef>
-          <a:fontRef idx="minor">
-            <a:schemeClr val="lt1"/>
-          </a:fontRef>
-        </p:style>
-        <p:txBody>
-          <a:bodyPr rtlCol="0" anchor="ctr"/>
-          <a:lstStyle/>
-          <a:p>
-            <a:pPr algn="ctr"/>
-            <a:endParaRPr sz="1600">
-              <a:latin typeface="Candara" panose="020E0502030303020204" pitchFamily="34" charset="0"/>
-            </a:endParaRPr>
-          </a:p>
-        </p:txBody>
-      </p:sp>
-      <p:sp>
-        <p:nvSpPr>
-          <p:cNvPr id="34" name="Rectangle 33"/>
-          <p:cNvSpPr/>
-          <p:nvPr/>
-        </p:nvSpPr>
-        <p:spPr>
-          <a:xfrm>
-            <a:off x="0" y="6016752"/>
-            <a:ext cx="12188952" cy="41148"/>
-          </a:xfrm>
-          <a:prstGeom prst="rect">
-            <a:avLst/>
-          </a:prstGeom>
-          <a:solidFill>
-            <a:srgbClr val="00C896"/>
           </a:solidFill>
           <a:ln>
             <a:noFill/>
@@ -16437,7 +16141,7 @@
         </p:nvSpPr>
         <p:spPr>
           <a:xfrm>
-            <a:off x="1088226" y="643652"/>
+            <a:off x="6473267" y="1064758"/>
             <a:ext cx="5040162" cy="738664"/>
           </a:xfrm>
           <a:prstGeom prst="rect">
@@ -16471,7 +16175,7 @@
         </p:nvSpPr>
         <p:spPr>
           <a:xfrm>
-            <a:off x="1088226" y="2056100"/>
+            <a:off x="892830" y="874258"/>
             <a:ext cx="3881191" cy="615553"/>
           </a:xfrm>
           <a:prstGeom prst="rect">
@@ -16532,7 +16236,7 @@
         </p:nvSpPr>
         <p:spPr>
           <a:xfrm>
-            <a:off x="1088226" y="4314828"/>
+            <a:off x="2434200" y="2891698"/>
             <a:ext cx="3068469" cy="615553"/>
           </a:xfrm>
           <a:prstGeom prst="rect">
@@ -16553,7 +16257,25 @@
                 </a:solidFill>
                 <a:latin typeface="Candara" panose="020E0502030303020204" pitchFamily="34" charset="0"/>
               </a:rPr>
-              <a:t>03 </a:t>
+              <a:t>0</a:t>
+            </a:r>
+            <a:r>
+              <a:rPr lang="en-US" sz="2000" b="1" dirty="0">
+                <a:solidFill>
+                  <a:srgbClr val="00C896"/>
+                </a:solidFill>
+                <a:latin typeface="Candara" panose="020E0502030303020204" pitchFamily="34" charset="0"/>
+              </a:rPr>
+              <a:t>4</a:t>
+            </a:r>
+            <a:r>
+              <a:rPr sz="2000" b="1" dirty="0">
+                <a:solidFill>
+                  <a:srgbClr val="00C896"/>
+                </a:solidFill>
+                <a:latin typeface="Candara" panose="020E0502030303020204" pitchFamily="34" charset="0"/>
+              </a:rPr>
+              <a:t> </a:t>
             </a:r>
             <a:r>
               <a:rPr b="1" dirty="0">
@@ -16580,25 +16302,7 @@
                 </a:solidFill>
                 <a:latin typeface="Candara" panose="020E0502030303020204" pitchFamily="34" charset="0"/>
               </a:rPr>
-              <a:t>Edge → API → DB → </a:t>
-            </a:r>
-            <a:r>
-              <a:rPr sz="1400" dirty="0" err="1">
-                <a:solidFill>
-                  <a:srgbClr val="B4B4B4"/>
-                </a:solidFill>
-                <a:latin typeface="Candara" panose="020E0502030303020204" pitchFamily="34" charset="0"/>
-              </a:rPr>
-              <a:t>SignalR</a:t>
-            </a:r>
-            <a:r>
-              <a:rPr sz="1400" dirty="0">
-                <a:solidFill>
-                  <a:srgbClr val="B4B4B4"/>
-                </a:solidFill>
-                <a:latin typeface="Candara" panose="020E0502030303020204" pitchFamily="34" charset="0"/>
-              </a:rPr>
-              <a:t> → React</a:t>
+              <a:t>Edge → API → DB → SignalR → React</a:t>
             </a:r>
           </a:p>
         </p:txBody>
@@ -16611,7 +16315,7 @@
         </p:nvSpPr>
         <p:spPr>
           <a:xfrm>
-            <a:off x="5248378" y="2056100"/>
+            <a:off x="2434200" y="3545818"/>
             <a:ext cx="2670924" cy="615553"/>
           </a:xfrm>
           <a:prstGeom prst="rect">
@@ -16672,7 +16376,7 @@
         </p:nvSpPr>
         <p:spPr>
           <a:xfrm>
-            <a:off x="5248378" y="4314828"/>
+            <a:off x="2434200" y="4713114"/>
             <a:ext cx="2609625" cy="615553"/>
           </a:xfrm>
           <a:prstGeom prst="rect">
@@ -16720,25 +16424,7 @@
                 </a:solidFill>
                 <a:latin typeface="Candara" panose="020E0502030303020204" pitchFamily="34" charset="0"/>
               </a:rPr>
-              <a:t>React SPA, charts, </a:t>
-            </a:r>
-            <a:r>
-              <a:rPr sz="1400" dirty="0" err="1">
-                <a:solidFill>
-                  <a:srgbClr val="B4B4B4"/>
-                </a:solidFill>
-                <a:latin typeface="Candara" panose="020E0502030303020204" pitchFamily="34" charset="0"/>
-              </a:rPr>
-              <a:t>SignalR</a:t>
-            </a:r>
-            <a:r>
-              <a:rPr sz="1400" dirty="0">
-                <a:solidFill>
-                  <a:srgbClr val="B4B4B4"/>
-                </a:solidFill>
-                <a:latin typeface="Candara" panose="020E0502030303020204" pitchFamily="34" charset="0"/>
-              </a:rPr>
-              <a:t> client</a:t>
+              <a:t>React SPA, charts, SignalR client</a:t>
             </a:r>
           </a:p>
         </p:txBody>
@@ -16751,7 +16437,7 @@
         </p:nvSpPr>
         <p:spPr>
           <a:xfrm>
-            <a:off x="8337996" y="3154782"/>
+            <a:off x="6335537" y="4011116"/>
             <a:ext cx="2985113" cy="615553"/>
           </a:xfrm>
           <a:prstGeom prst="rect">
@@ -16799,25 +16485,7 @@
                 </a:solidFill>
                 <a:latin typeface="Candara" panose="020E0502030303020204" pitchFamily="34" charset="0"/>
               </a:rPr>
-              <a:t>Edge → API → </a:t>
-            </a:r>
-            <a:r>
-              <a:rPr sz="1400" dirty="0" err="1">
-                <a:solidFill>
-                  <a:srgbClr val="B4B4B4"/>
-                </a:solidFill>
-                <a:latin typeface="Candara" panose="020E0502030303020204" pitchFamily="34" charset="0"/>
-              </a:rPr>
-              <a:t>SignalR</a:t>
-            </a:r>
-            <a:r>
-              <a:rPr sz="1400" dirty="0">
-                <a:solidFill>
-                  <a:srgbClr val="B4B4B4"/>
-                </a:solidFill>
-                <a:latin typeface="Candara" panose="020E0502030303020204" pitchFamily="34" charset="0"/>
-              </a:rPr>
-              <a:t> → Dashboard</a:t>
+              <a:t>Edge → API → SignalR → Dashboard</a:t>
             </a:r>
           </a:p>
         </p:txBody>
@@ -16830,7 +16498,7 @@
         </p:nvSpPr>
         <p:spPr>
           <a:xfrm>
-            <a:off x="8337996" y="5615537"/>
+            <a:off x="8157106" y="5374446"/>
             <a:ext cx="2403222" cy="400110"/>
           </a:xfrm>
           <a:prstGeom prst="rect">
@@ -16873,7 +16541,7 @@
         </p:nvSpPr>
         <p:spPr>
           <a:xfrm>
-            <a:off x="1088226" y="3154782"/>
+            <a:off x="892830" y="1489811"/>
             <a:ext cx="3015569" cy="615553"/>
           </a:xfrm>
           <a:prstGeom prst="rect">
@@ -16934,7 +16602,7 @@
         </p:nvSpPr>
         <p:spPr>
           <a:xfrm>
-            <a:off x="1088226" y="5400094"/>
+            <a:off x="2409917" y="2308050"/>
             <a:ext cx="2935419" cy="615553"/>
           </a:xfrm>
           <a:prstGeom prst="rect">
@@ -16955,7 +16623,25 @@
                 </a:solidFill>
                 <a:latin typeface="Candara" panose="020E0502030303020204" pitchFamily="34" charset="0"/>
               </a:rPr>
-              <a:t>04 </a:t>
+              <a:t>0</a:t>
+            </a:r>
+            <a:r>
+              <a:rPr lang="en-US" sz="2000" b="1" dirty="0">
+                <a:solidFill>
+                  <a:srgbClr val="00C896"/>
+                </a:solidFill>
+                <a:latin typeface="Candara" panose="020E0502030303020204" pitchFamily="34" charset="0"/>
+              </a:rPr>
+              <a:t>3</a:t>
+            </a:r>
+            <a:r>
+              <a:rPr sz="2000" b="1" dirty="0">
+                <a:solidFill>
+                  <a:srgbClr val="00C896"/>
+                </a:solidFill>
+                <a:latin typeface="Candara" panose="020E0502030303020204" pitchFamily="34" charset="0"/>
+              </a:rPr>
+              <a:t> </a:t>
             </a:r>
             <a:r>
               <a:rPr b="1" dirty="0">
@@ -16995,7 +16681,7 @@
         </p:nvSpPr>
         <p:spPr>
           <a:xfrm>
-            <a:off x="5248378" y="3154782"/>
+            <a:off x="2434200" y="4161371"/>
             <a:ext cx="2282997" cy="615553"/>
           </a:xfrm>
           <a:prstGeom prst="rect">
@@ -17056,7 +16742,7 @@
         </p:nvSpPr>
         <p:spPr>
           <a:xfrm>
-            <a:off x="5248378" y="5400094"/>
+            <a:off x="6335537" y="3433941"/>
             <a:ext cx="2443298" cy="615553"/>
           </a:xfrm>
           <a:prstGeom prst="rect">
@@ -17117,7 +16803,7 @@
         </p:nvSpPr>
         <p:spPr>
           <a:xfrm>
-            <a:off x="8337996" y="4314828"/>
+            <a:off x="8157106" y="4769575"/>
             <a:ext cx="2719014" cy="615553"/>
           </a:xfrm>
           <a:prstGeom prst="rect">
@@ -17167,6 +16853,226 @@
               </a:rPr>
               <a:t>Sync, data volume, design</a:t>
             </a:r>
+          </a:p>
+        </p:txBody>
+      </p:sp>
+      <p:sp>
+        <p:nvSpPr>
+          <p:cNvPr id="18" name="Rectangle 17">
+            <a:extLst>
+              <a:ext uri="{FF2B5EF4-FFF2-40B4-BE49-F238E27FC236}">
+                <a16:creationId xmlns:a16="http://schemas.microsoft.com/office/drawing/2014/main" id="{7A60A0DC-5A25-B5D0-F04A-ADB174D0DA3B}"/>
+              </a:ext>
+            </a:extLst>
+          </p:cNvPr>
+          <p:cNvSpPr/>
+          <p:nvPr/>
+        </p:nvSpPr>
+        <p:spPr>
+          <a:xfrm>
+            <a:off x="847110" y="943764"/>
+            <a:ext cx="45719" cy="1161600"/>
+          </a:xfrm>
+          <a:prstGeom prst="rect">
+            <a:avLst/>
+          </a:prstGeom>
+          <a:solidFill>
+            <a:srgbClr val="00C896"/>
+          </a:solidFill>
+          <a:ln>
+            <a:noFill/>
+          </a:ln>
+        </p:spPr>
+        <p:style>
+          <a:lnRef idx="1">
+            <a:schemeClr val="accent1"/>
+          </a:lnRef>
+          <a:fillRef idx="3">
+            <a:schemeClr val="accent1"/>
+          </a:fillRef>
+          <a:effectRef idx="2">
+            <a:schemeClr val="accent1"/>
+          </a:effectRef>
+          <a:fontRef idx="minor">
+            <a:schemeClr val="lt1"/>
+          </a:fontRef>
+        </p:style>
+        <p:txBody>
+          <a:bodyPr rtlCol="0" anchor="ctr"/>
+          <a:lstStyle/>
+          <a:p>
+            <a:pPr algn="ctr"/>
+            <a:endParaRPr>
+              <a:solidFill>
+                <a:prstClr val="white"/>
+              </a:solidFill>
+              <a:latin typeface="Candara" panose="020E0502030303020204" pitchFamily="34" charset="0"/>
+            </a:endParaRPr>
+          </a:p>
+        </p:txBody>
+      </p:sp>
+      <p:sp>
+        <p:nvSpPr>
+          <p:cNvPr id="19" name="Rectangle 18">
+            <a:extLst>
+              <a:ext uri="{FF2B5EF4-FFF2-40B4-BE49-F238E27FC236}">
+                <a16:creationId xmlns:a16="http://schemas.microsoft.com/office/drawing/2014/main" id="{9B2BE0BE-BE12-15B6-6FB4-577775C6ADF9}"/>
+              </a:ext>
+            </a:extLst>
+          </p:cNvPr>
+          <p:cNvSpPr/>
+          <p:nvPr/>
+        </p:nvSpPr>
+        <p:spPr>
+          <a:xfrm>
+            <a:off x="2409917" y="2425852"/>
+            <a:ext cx="45719" cy="2838874"/>
+          </a:xfrm>
+          <a:prstGeom prst="rect">
+            <a:avLst/>
+          </a:prstGeom>
+          <a:solidFill>
+            <a:srgbClr val="00C896"/>
+          </a:solidFill>
+          <a:ln>
+            <a:noFill/>
+          </a:ln>
+        </p:spPr>
+        <p:style>
+          <a:lnRef idx="1">
+            <a:schemeClr val="accent1"/>
+          </a:lnRef>
+          <a:fillRef idx="3">
+            <a:schemeClr val="accent1"/>
+          </a:fillRef>
+          <a:effectRef idx="2">
+            <a:schemeClr val="accent1"/>
+          </a:effectRef>
+          <a:fontRef idx="minor">
+            <a:schemeClr val="lt1"/>
+          </a:fontRef>
+        </p:style>
+        <p:txBody>
+          <a:bodyPr rtlCol="0" anchor="ctr"/>
+          <a:lstStyle/>
+          <a:p>
+            <a:pPr algn="ctr"/>
+            <a:endParaRPr>
+              <a:solidFill>
+                <a:prstClr val="white"/>
+              </a:solidFill>
+              <a:latin typeface="Candara" panose="020E0502030303020204" pitchFamily="34" charset="0"/>
+            </a:endParaRPr>
+          </a:p>
+        </p:txBody>
+      </p:sp>
+      <p:sp>
+        <p:nvSpPr>
+          <p:cNvPr id="20" name="Rectangle 19">
+            <a:extLst>
+              <a:ext uri="{FF2B5EF4-FFF2-40B4-BE49-F238E27FC236}">
+                <a16:creationId xmlns:a16="http://schemas.microsoft.com/office/drawing/2014/main" id="{B50D11DC-EBC0-F231-0D3F-8D904D290C17}"/>
+              </a:ext>
+            </a:extLst>
+          </p:cNvPr>
+          <p:cNvSpPr/>
+          <p:nvPr/>
+        </p:nvSpPr>
+        <p:spPr>
+          <a:xfrm>
+            <a:off x="6274238" y="3536582"/>
+            <a:ext cx="45719" cy="1074970"/>
+          </a:xfrm>
+          <a:prstGeom prst="rect">
+            <a:avLst/>
+          </a:prstGeom>
+          <a:solidFill>
+            <a:srgbClr val="00C896"/>
+          </a:solidFill>
+          <a:ln>
+            <a:noFill/>
+          </a:ln>
+        </p:spPr>
+        <p:style>
+          <a:lnRef idx="1">
+            <a:schemeClr val="accent1"/>
+          </a:lnRef>
+          <a:fillRef idx="3">
+            <a:schemeClr val="accent1"/>
+          </a:fillRef>
+          <a:effectRef idx="2">
+            <a:schemeClr val="accent1"/>
+          </a:effectRef>
+          <a:fontRef idx="minor">
+            <a:schemeClr val="lt1"/>
+          </a:fontRef>
+        </p:style>
+        <p:txBody>
+          <a:bodyPr rtlCol="0" anchor="ctr"/>
+          <a:lstStyle/>
+          <a:p>
+            <a:pPr algn="ctr"/>
+            <a:endParaRPr>
+              <a:solidFill>
+                <a:prstClr val="white"/>
+              </a:solidFill>
+              <a:latin typeface="Candara" panose="020E0502030303020204" pitchFamily="34" charset="0"/>
+            </a:endParaRPr>
+          </a:p>
+        </p:txBody>
+      </p:sp>
+      <p:sp>
+        <p:nvSpPr>
+          <p:cNvPr id="21" name="Rectangle 20">
+            <a:extLst>
+              <a:ext uri="{FF2B5EF4-FFF2-40B4-BE49-F238E27FC236}">
+                <a16:creationId xmlns:a16="http://schemas.microsoft.com/office/drawing/2014/main" id="{4684EF93-60A4-DC62-2410-6BC6FAE8EAA4}"/>
+              </a:ext>
+            </a:extLst>
+          </p:cNvPr>
+          <p:cNvSpPr/>
+          <p:nvPr/>
+        </p:nvSpPr>
+        <p:spPr>
+          <a:xfrm>
+            <a:off x="8131984" y="4842384"/>
+            <a:ext cx="45720" cy="1000716"/>
+          </a:xfrm>
+          <a:prstGeom prst="rect">
+            <a:avLst/>
+          </a:prstGeom>
+          <a:solidFill>
+            <a:srgbClr val="00C896"/>
+          </a:solidFill>
+          <a:ln>
+            <a:noFill/>
+          </a:ln>
+        </p:spPr>
+        <p:style>
+          <a:lnRef idx="1">
+            <a:schemeClr val="accent1"/>
+          </a:lnRef>
+          <a:fillRef idx="3">
+            <a:schemeClr val="accent1"/>
+          </a:fillRef>
+          <a:effectRef idx="2">
+            <a:schemeClr val="accent1"/>
+          </a:effectRef>
+          <a:fontRef idx="minor">
+            <a:schemeClr val="lt1"/>
+          </a:fontRef>
+        </p:style>
+        <p:txBody>
+          <a:bodyPr rtlCol="0" anchor="ctr"/>
+          <a:lstStyle/>
+          <a:p>
+            <a:pPr algn="ctr"/>
+            <a:endParaRPr>
+              <a:solidFill>
+                <a:prstClr val="white"/>
+              </a:solidFill>
+              <a:latin typeface="Candara" panose="020E0502030303020204" pitchFamily="34" charset="0"/>
+            </a:endParaRPr>
           </a:p>
         </p:txBody>
       </p:sp>
@@ -17212,7 +17118,7 @@
         <p:spPr>
           <a:xfrm>
             <a:off x="1097152" y="671746"/>
-            <a:ext cx="3283271" cy="707886"/>
+            <a:ext cx="4182555" cy="707886"/>
           </a:xfrm>
           <a:prstGeom prst="rect">
             <a:avLst/>
@@ -17226,67 +17132,214 @@
           <a:lstStyle/>
           <a:p>
             <a:r>
-              <a:rPr sz="4000" b="1">
+              <a:rPr lang="en-US" sz="4000" b="1" dirty="0">
                 <a:solidFill>
                   <a:srgbClr val="FFFFFF"/>
                 </a:solidFill>
                 <a:latin typeface="Candara" panose="020E0502030303020204" pitchFamily="34" charset="0"/>
               </a:rPr>
-              <a:t>The Challenge</a:t>
-            </a:r>
-          </a:p>
-        </p:txBody>
-      </p:sp>
-      <p:sp>
-        <p:nvSpPr>
-          <p:cNvPr id="4" name="TextBox 3"/>
-          <p:cNvSpPr txBox="1"/>
-          <p:nvPr/>
-        </p:nvSpPr>
-        <p:spPr>
-          <a:xfrm>
-            <a:off x="1097152" y="1311826"/>
-            <a:ext cx="9786653" cy="338554"/>
+              <a:t>Project Statement</a:t>
+            </a:r>
+            <a:endParaRPr sz="4000" b="1" dirty="0">
+              <a:solidFill>
+                <a:srgbClr val="FFFFFF"/>
+              </a:solidFill>
+              <a:latin typeface="Candara" panose="020E0502030303020204" pitchFamily="34" charset="0"/>
+            </a:endParaRPr>
+          </a:p>
+        </p:txBody>
+      </p:sp>
+      <p:sp>
+        <p:nvSpPr>
+          <p:cNvPr id="22" name="Rectangle 21">
+            <a:extLst>
+              <a:ext uri="{FF2B5EF4-FFF2-40B4-BE49-F238E27FC236}">
+                <a16:creationId xmlns:a16="http://schemas.microsoft.com/office/drawing/2014/main" id="{57379C31-8748-7246-01AA-7BEAE5FEA316}"/>
+              </a:ext>
+            </a:extLst>
+          </p:cNvPr>
+          <p:cNvSpPr/>
+          <p:nvPr/>
+        </p:nvSpPr>
+        <p:spPr>
+          <a:xfrm>
+            <a:off x="1097152" y="1489012"/>
+            <a:ext cx="10577612" cy="4595792"/>
           </a:xfrm>
           <a:prstGeom prst="rect">
             <a:avLst/>
           </a:prstGeom>
           <a:noFill/>
-        </p:spPr>
-        <p:txBody>
-          <a:bodyPr wrap="none">
-            <a:spAutoFit/>
-          </a:bodyPr>
-          <a:lstStyle/>
-          <a:p>
-            <a:r>
-              <a:rPr sz="1600">
-                <a:solidFill>
-                  <a:srgbClr val="B4C8BE"/>
-                </a:solidFill>
-                <a:latin typeface="Candara" panose="020E0502030303020204" pitchFamily="34" charset="0"/>
-              </a:rPr>
-              <a:t>Industrial, commercial, and agricultural facilities need continuous monitoring — but current solutions fall short.</a:t>
-            </a:r>
-          </a:p>
-        </p:txBody>
-      </p:sp>
-      <p:sp>
-        <p:nvSpPr>
-          <p:cNvPr id="5" name="Rectangle 4"/>
+          <a:ln>
+            <a:noFill/>
+          </a:ln>
+        </p:spPr>
+        <p:style>
+          <a:lnRef idx="1">
+            <a:schemeClr val="accent1"/>
+          </a:lnRef>
+          <a:fillRef idx="3">
+            <a:schemeClr val="accent1"/>
+          </a:fillRef>
+          <a:effectRef idx="2">
+            <a:schemeClr val="accent1"/>
+          </a:effectRef>
+          <a:fontRef idx="minor">
+            <a:schemeClr val="lt1"/>
+          </a:fontRef>
+        </p:style>
+        <p:txBody>
+          <a:bodyPr rtlCol="0" anchor="ctr"/>
+          <a:lstStyle/>
+          <a:p>
+            <a:pPr>
+              <a:lnSpc>
+                <a:spcPct val="150000"/>
+              </a:lnSpc>
+            </a:pPr>
+            <a:r>
+              <a:rPr lang="en-US" i="1" dirty="0">
+                <a:solidFill>
+                  <a:srgbClr val="00B050"/>
+                </a:solidFill>
+                <a:latin typeface="Candara" panose="020E0502030303020204" pitchFamily="34" charset="0"/>
+              </a:rPr>
+              <a:t>Continuous monitoring is critical in industrial, commercial, and agricultural settings for safety, early fault detection, and performance optimization. However, SCADA/BMS solutions are often costly, complex, and vendor-locked. This project delivers a web-based IoT monitoring system that is:</a:t>
+            </a:r>
+          </a:p>
+          <a:p>
+            <a:pPr>
+              <a:lnSpc>
+                <a:spcPct val="150000"/>
+              </a:lnSpc>
+            </a:pPr>
+            <a:endParaRPr lang="en-US" i="1" dirty="0">
+              <a:solidFill>
+                <a:schemeClr val="bg1"/>
+              </a:solidFill>
+              <a:latin typeface="Candara" panose="020E0502030303020204" pitchFamily="34" charset="0"/>
+            </a:endParaRPr>
+          </a:p>
+          <a:p>
+            <a:pPr lvl="2">
+              <a:lnSpc>
+                <a:spcPct val="150000"/>
+              </a:lnSpc>
+            </a:pPr>
+            <a:r>
+              <a:rPr lang="en-US" dirty="0">
+                <a:solidFill>
+                  <a:srgbClr val="92D050"/>
+                </a:solidFill>
+                <a:latin typeface="Candara" panose="020E0502030303020204" pitchFamily="34" charset="0"/>
+              </a:rPr>
+              <a:t>Web-based (no proprietary hardware)</a:t>
+            </a:r>
+          </a:p>
+          <a:p>
+            <a:pPr lvl="2">
+              <a:lnSpc>
+                <a:spcPct val="150000"/>
+              </a:lnSpc>
+            </a:pPr>
+            <a:r>
+              <a:rPr lang="en-US" dirty="0">
+                <a:solidFill>
+                  <a:srgbClr val="92D050"/>
+                </a:solidFill>
+                <a:latin typeface="Candara" panose="020E0502030303020204" pitchFamily="34" charset="0"/>
+              </a:rPr>
+              <a:t>Real-time (SignalR/WebSocket)</a:t>
+            </a:r>
+          </a:p>
+          <a:p>
+            <a:pPr lvl="2">
+              <a:lnSpc>
+                <a:spcPct val="150000"/>
+              </a:lnSpc>
+            </a:pPr>
+            <a:r>
+              <a:rPr lang="en-US" dirty="0">
+                <a:solidFill>
+                  <a:srgbClr val="92D050"/>
+                </a:solidFill>
+                <a:latin typeface="Candara" panose="020E0502030303020204" pitchFamily="34" charset="0"/>
+              </a:rPr>
+              <a:t>Backed by SQL Server (historical data)</a:t>
+            </a:r>
+          </a:p>
+          <a:p>
+            <a:pPr lvl="2">
+              <a:lnSpc>
+                <a:spcPct val="150000"/>
+              </a:lnSpc>
+            </a:pPr>
+            <a:r>
+              <a:rPr lang="en-US" dirty="0">
+                <a:solidFill>
+                  <a:srgbClr val="92D050"/>
+                </a:solidFill>
+                <a:latin typeface="Candara" panose="020E0502030303020204" pitchFamily="34" charset="0"/>
+              </a:rPr>
+              <a:t>Accessible from any browser</a:t>
+            </a:r>
+          </a:p>
+          <a:p>
+            <a:pPr lvl="2">
+              <a:lnSpc>
+                <a:spcPct val="150000"/>
+              </a:lnSpc>
+            </a:pPr>
+            <a:r>
+              <a:rPr lang="en-US" dirty="0">
+                <a:solidFill>
+                  <a:srgbClr val="92D050"/>
+                </a:solidFill>
+                <a:latin typeface="Candara" panose="020E0502030303020204" pitchFamily="34" charset="0"/>
+              </a:rPr>
+              <a:t>Cost-effective (open-source stack)</a:t>
+            </a:r>
+          </a:p>
+          <a:p>
+            <a:pPr lvl="2">
+              <a:lnSpc>
+                <a:spcPct val="150000"/>
+              </a:lnSpc>
+            </a:pPr>
+            <a:r>
+              <a:rPr lang="en-US" dirty="0">
+                <a:solidFill>
+                  <a:srgbClr val="92D050"/>
+                </a:solidFill>
+                <a:latin typeface="Candara" panose="020E0502030303020204" pitchFamily="34" charset="0"/>
+              </a:rPr>
+              <a:t>Aim to work with low-cost hardware like Arduino, ESP32, Raspberry Pi</a:t>
+            </a:r>
+          </a:p>
+        </p:txBody>
+      </p:sp>
+      <p:sp>
+        <p:nvSpPr>
+          <p:cNvPr id="29" name="Rectangle 28">
+            <a:extLst>
+              <a:ext uri="{FF2B5EF4-FFF2-40B4-BE49-F238E27FC236}">
+                <a16:creationId xmlns:a16="http://schemas.microsoft.com/office/drawing/2014/main" id="{D1997190-A3C0-DE6F-5A6B-7FE192DCD002}"/>
+              </a:ext>
+            </a:extLst>
+          </p:cNvPr>
           <p:cNvSpPr/>
           <p:nvPr/>
         </p:nvSpPr>
         <p:spPr>
           <a:xfrm>
-            <a:off x="1188592" y="2469105"/>
-            <a:ext cx="45720" cy="640080"/>
+            <a:off x="1966254" y="3546763"/>
+            <a:ext cx="45719" cy="2281380"/>
           </a:xfrm>
           <a:prstGeom prst="rect">
             <a:avLst/>
           </a:prstGeom>
           <a:solidFill>
-            <a:srgbClr val="C85050"/>
+            <a:srgbClr val="00C896"/>
           </a:solidFill>
           <a:ln>
             <a:noFill/>
@@ -17317,656 +17370,6 @@
               </a:solidFill>
               <a:latin typeface="Candara" panose="020E0502030303020204" pitchFamily="34" charset="0"/>
             </a:endParaRPr>
-          </a:p>
-        </p:txBody>
-      </p:sp>
-      <p:sp>
-        <p:nvSpPr>
-          <p:cNvPr id="6" name="TextBox 5"/>
-          <p:cNvSpPr txBox="1"/>
-          <p:nvPr/>
-        </p:nvSpPr>
-        <p:spPr>
-          <a:xfrm>
-            <a:off x="1280032" y="2469106"/>
-            <a:ext cx="5864106" cy="584775"/>
-          </a:xfrm>
-          <a:prstGeom prst="rect">
-            <a:avLst/>
-          </a:prstGeom>
-          <a:noFill/>
-        </p:spPr>
-        <p:txBody>
-          <a:bodyPr wrap="none">
-            <a:spAutoFit/>
-          </a:bodyPr>
-          <a:lstStyle/>
-          <a:p>
-            <a:r>
-              <a:rPr b="1" dirty="0">
-                <a:solidFill>
-                  <a:srgbClr val="FFFFFF"/>
-                </a:solidFill>
-                <a:latin typeface="Candara" panose="020E0502030303020204" pitchFamily="34" charset="0"/>
-              </a:rPr>
-              <a:t>Equipment Failure Risk</a:t>
-            </a:r>
-          </a:p>
-          <a:p>
-            <a:r>
-              <a:rPr sz="1400" dirty="0">
-                <a:solidFill>
-                  <a:srgbClr val="B4C8BE"/>
-                </a:solidFill>
-                <a:latin typeface="Candara" panose="020E0502030303020204" pitchFamily="34" charset="0"/>
-              </a:rPr>
-              <a:t>Unmonitored devices lead to costly failures, downtime, and safety hazards.</a:t>
-            </a:r>
-          </a:p>
-        </p:txBody>
-      </p:sp>
-      <p:sp>
-        <p:nvSpPr>
-          <p:cNvPr id="7" name="Rectangle 6"/>
-          <p:cNvSpPr/>
-          <p:nvPr/>
-        </p:nvSpPr>
-        <p:spPr>
-          <a:xfrm>
-            <a:off x="1188592" y="3292065"/>
-            <a:ext cx="45720" cy="640080"/>
-          </a:xfrm>
-          <a:prstGeom prst="rect">
-            <a:avLst/>
-          </a:prstGeom>
-          <a:solidFill>
-            <a:srgbClr val="C85050"/>
-          </a:solidFill>
-          <a:ln>
-            <a:noFill/>
-          </a:ln>
-        </p:spPr>
-        <p:style>
-          <a:lnRef idx="1">
-            <a:schemeClr val="accent1"/>
-          </a:lnRef>
-          <a:fillRef idx="3">
-            <a:schemeClr val="accent1"/>
-          </a:fillRef>
-          <a:effectRef idx="2">
-            <a:schemeClr val="accent1"/>
-          </a:effectRef>
-          <a:fontRef idx="minor">
-            <a:schemeClr val="lt1"/>
-          </a:fontRef>
-        </p:style>
-        <p:txBody>
-          <a:bodyPr rtlCol="0" anchor="ctr"/>
-          <a:lstStyle/>
-          <a:p>
-            <a:pPr algn="ctr"/>
-            <a:endParaRPr>
-              <a:solidFill>
-                <a:prstClr val="white"/>
-              </a:solidFill>
-              <a:latin typeface="Candara" panose="020E0502030303020204" pitchFamily="34" charset="0"/>
-            </a:endParaRPr>
-          </a:p>
-        </p:txBody>
-      </p:sp>
-      <p:sp>
-        <p:nvSpPr>
-          <p:cNvPr id="8" name="TextBox 7"/>
-          <p:cNvSpPr txBox="1"/>
-          <p:nvPr/>
-        </p:nvSpPr>
-        <p:spPr>
-          <a:xfrm>
-            <a:off x="1280033" y="3292066"/>
-            <a:ext cx="5857694" cy="584775"/>
-          </a:xfrm>
-          <a:prstGeom prst="rect">
-            <a:avLst/>
-          </a:prstGeom>
-          <a:noFill/>
-        </p:spPr>
-        <p:txBody>
-          <a:bodyPr wrap="none">
-            <a:spAutoFit/>
-          </a:bodyPr>
-          <a:lstStyle/>
-          <a:p>
-            <a:r>
-              <a:rPr b="1" dirty="0">
-                <a:solidFill>
-                  <a:srgbClr val="FFFFFF"/>
-                </a:solidFill>
-                <a:latin typeface="Candara" panose="020E0502030303020204" pitchFamily="34" charset="0"/>
-              </a:rPr>
-              <a:t>Distributed Locations</a:t>
-            </a:r>
-          </a:p>
-          <a:p>
-            <a:r>
-              <a:rPr sz="1400" dirty="0">
-                <a:solidFill>
-                  <a:srgbClr val="B4C8BE"/>
-                </a:solidFill>
-                <a:latin typeface="Candara" panose="020E0502030303020204" pitchFamily="34" charset="0"/>
-              </a:rPr>
-              <a:t>Equipment spans multiple facilities — no single point of visibility or control.</a:t>
-            </a:r>
-          </a:p>
-        </p:txBody>
-      </p:sp>
-      <p:sp>
-        <p:nvSpPr>
-          <p:cNvPr id="9" name="Rectangle 8"/>
-          <p:cNvSpPr/>
-          <p:nvPr/>
-        </p:nvSpPr>
-        <p:spPr>
-          <a:xfrm>
-            <a:off x="1188592" y="4115025"/>
-            <a:ext cx="45720" cy="640080"/>
-          </a:xfrm>
-          <a:prstGeom prst="rect">
-            <a:avLst/>
-          </a:prstGeom>
-          <a:solidFill>
-            <a:srgbClr val="C89600"/>
-          </a:solidFill>
-          <a:ln>
-            <a:noFill/>
-          </a:ln>
-        </p:spPr>
-        <p:style>
-          <a:lnRef idx="1">
-            <a:schemeClr val="accent1"/>
-          </a:lnRef>
-          <a:fillRef idx="3">
-            <a:schemeClr val="accent1"/>
-          </a:fillRef>
-          <a:effectRef idx="2">
-            <a:schemeClr val="accent1"/>
-          </a:effectRef>
-          <a:fontRef idx="minor">
-            <a:schemeClr val="lt1"/>
-          </a:fontRef>
-        </p:style>
-        <p:txBody>
-          <a:bodyPr rtlCol="0" anchor="ctr"/>
-          <a:lstStyle/>
-          <a:p>
-            <a:pPr algn="ctr"/>
-            <a:endParaRPr>
-              <a:solidFill>
-                <a:prstClr val="white"/>
-              </a:solidFill>
-              <a:latin typeface="Candara" panose="020E0502030303020204" pitchFamily="34" charset="0"/>
-            </a:endParaRPr>
-          </a:p>
-        </p:txBody>
-      </p:sp>
-      <p:sp>
-        <p:nvSpPr>
-          <p:cNvPr id="10" name="TextBox 9"/>
-          <p:cNvSpPr txBox="1"/>
-          <p:nvPr/>
-        </p:nvSpPr>
-        <p:spPr>
-          <a:xfrm>
-            <a:off x="1280033" y="4115026"/>
-            <a:ext cx="6215163" cy="584775"/>
-          </a:xfrm>
-          <a:prstGeom prst="rect">
-            <a:avLst/>
-          </a:prstGeom>
-          <a:noFill/>
-        </p:spPr>
-        <p:txBody>
-          <a:bodyPr wrap="none">
-            <a:spAutoFit/>
-          </a:bodyPr>
-          <a:lstStyle/>
-          <a:p>
-            <a:r>
-              <a:rPr b="1" dirty="0">
-                <a:solidFill>
-                  <a:srgbClr val="FFFFFF"/>
-                </a:solidFill>
-                <a:latin typeface="Candara" panose="020E0502030303020204" pitchFamily="34" charset="0"/>
-              </a:rPr>
-              <a:t>SCADA</a:t>
-            </a:r>
-            <a:r>
-              <a:rPr lang="en-US" b="1" dirty="0">
-                <a:solidFill>
-                  <a:srgbClr val="FFFFFF"/>
-                </a:solidFill>
-                <a:latin typeface="Candara" panose="020E0502030303020204" pitchFamily="34" charset="0"/>
-              </a:rPr>
-              <a:t>/BMS</a:t>
-            </a:r>
-            <a:r>
-              <a:rPr b="1" dirty="0">
-                <a:solidFill>
-                  <a:srgbClr val="FFFFFF"/>
-                </a:solidFill>
-                <a:latin typeface="Candara" panose="020E0502030303020204" pitchFamily="34" charset="0"/>
-              </a:rPr>
-              <a:t> Cost Barrier</a:t>
-            </a:r>
-          </a:p>
-          <a:p>
-            <a:r>
-              <a:rPr sz="1400" dirty="0">
-                <a:solidFill>
-                  <a:srgbClr val="B4C8BE"/>
-                </a:solidFill>
-                <a:latin typeface="Candara" panose="020E0502030303020204" pitchFamily="34" charset="0"/>
-              </a:rPr>
-              <a:t>Industrial SCADA</a:t>
-            </a:r>
-            <a:r>
-              <a:rPr lang="en-US" sz="1400" dirty="0">
-                <a:solidFill>
-                  <a:srgbClr val="B4C8BE"/>
-                </a:solidFill>
-                <a:latin typeface="Candara" panose="020E0502030303020204" pitchFamily="34" charset="0"/>
-              </a:rPr>
-              <a:t>/BMS</a:t>
-            </a:r>
-            <a:r>
-              <a:rPr sz="1400" dirty="0">
-                <a:solidFill>
-                  <a:srgbClr val="B4C8BE"/>
-                </a:solidFill>
-                <a:latin typeface="Candara" panose="020E0502030303020204" pitchFamily="34" charset="0"/>
-              </a:rPr>
-              <a:t> systems are expensive and require proprietary hardware.</a:t>
-            </a:r>
-          </a:p>
-        </p:txBody>
-      </p:sp>
-      <p:sp>
-        <p:nvSpPr>
-          <p:cNvPr id="11" name="Rectangle 10"/>
-          <p:cNvSpPr/>
-          <p:nvPr/>
-        </p:nvSpPr>
-        <p:spPr>
-          <a:xfrm>
-            <a:off x="1188592" y="4937985"/>
-            <a:ext cx="45720" cy="640080"/>
-          </a:xfrm>
-          <a:prstGeom prst="rect">
-            <a:avLst/>
-          </a:prstGeom>
-          <a:solidFill>
-            <a:srgbClr val="C89600"/>
-          </a:solidFill>
-          <a:ln>
-            <a:noFill/>
-          </a:ln>
-        </p:spPr>
-        <p:style>
-          <a:lnRef idx="1">
-            <a:schemeClr val="accent1"/>
-          </a:lnRef>
-          <a:fillRef idx="3">
-            <a:schemeClr val="accent1"/>
-          </a:fillRef>
-          <a:effectRef idx="2">
-            <a:schemeClr val="accent1"/>
-          </a:effectRef>
-          <a:fontRef idx="minor">
-            <a:schemeClr val="lt1"/>
-          </a:fontRef>
-        </p:style>
-        <p:txBody>
-          <a:bodyPr rtlCol="0" anchor="ctr"/>
-          <a:lstStyle/>
-          <a:p>
-            <a:pPr algn="ctr"/>
-            <a:endParaRPr>
-              <a:solidFill>
-                <a:prstClr val="white"/>
-              </a:solidFill>
-              <a:latin typeface="Candara" panose="020E0502030303020204" pitchFamily="34" charset="0"/>
-            </a:endParaRPr>
-          </a:p>
-        </p:txBody>
-      </p:sp>
-      <p:sp>
-        <p:nvSpPr>
-          <p:cNvPr id="12" name="TextBox 11"/>
-          <p:cNvSpPr txBox="1"/>
-          <p:nvPr/>
-        </p:nvSpPr>
-        <p:spPr>
-          <a:xfrm>
-            <a:off x="1280032" y="4937986"/>
-            <a:ext cx="5051383" cy="584775"/>
-          </a:xfrm>
-          <a:prstGeom prst="rect">
-            <a:avLst/>
-          </a:prstGeom>
-          <a:noFill/>
-        </p:spPr>
-        <p:txBody>
-          <a:bodyPr wrap="none">
-            <a:spAutoFit/>
-          </a:bodyPr>
-          <a:lstStyle/>
-          <a:p>
-            <a:r>
-              <a:rPr b="1" dirty="0">
-                <a:solidFill>
-                  <a:srgbClr val="FFFFFF"/>
-                </a:solidFill>
-                <a:latin typeface="Candara" panose="020E0502030303020204" pitchFamily="34" charset="0"/>
-              </a:rPr>
-              <a:t>No Historical Traceability</a:t>
-            </a:r>
-          </a:p>
-          <a:p>
-            <a:r>
-              <a:rPr sz="1400" dirty="0">
-                <a:solidFill>
-                  <a:srgbClr val="B4C8BE"/>
-                </a:solidFill>
-                <a:latin typeface="Candara" panose="020E0502030303020204" pitchFamily="34" charset="0"/>
-              </a:rPr>
-              <a:t>Without data logging, trend detection and analysis is impossible.</a:t>
-            </a:r>
-          </a:p>
-        </p:txBody>
-      </p:sp>
-      <p:sp>
-        <p:nvSpPr>
-          <p:cNvPr id="14" name="TextBox 13"/>
-          <p:cNvSpPr txBox="1"/>
-          <p:nvPr/>
-        </p:nvSpPr>
-        <p:spPr>
-          <a:xfrm>
-            <a:off x="7684126" y="2360712"/>
-            <a:ext cx="1577676" cy="400110"/>
-          </a:xfrm>
-          <a:prstGeom prst="rect">
-            <a:avLst/>
-          </a:prstGeom>
-          <a:noFill/>
-        </p:spPr>
-        <p:txBody>
-          <a:bodyPr wrap="none">
-            <a:spAutoFit/>
-          </a:bodyPr>
-          <a:lstStyle/>
-          <a:p>
-            <a:r>
-              <a:rPr sz="2000" b="1">
-                <a:solidFill>
-                  <a:srgbClr val="00C896"/>
-                </a:solidFill>
-                <a:latin typeface="Candara" panose="020E0502030303020204" pitchFamily="34" charset="0"/>
-              </a:rPr>
-              <a:t>Our Solution</a:t>
-            </a:r>
-          </a:p>
-        </p:txBody>
-      </p:sp>
-      <p:sp>
-        <p:nvSpPr>
-          <p:cNvPr id="15" name="Rectangle 14"/>
-          <p:cNvSpPr/>
-          <p:nvPr/>
-        </p:nvSpPr>
-        <p:spPr>
-          <a:xfrm>
-            <a:off x="7785659" y="2723581"/>
-            <a:ext cx="2630305" cy="45719"/>
-          </a:xfrm>
-          <a:prstGeom prst="rect">
-            <a:avLst/>
-          </a:prstGeom>
-          <a:solidFill>
-            <a:srgbClr val="00C896"/>
-          </a:solidFill>
-          <a:ln>
-            <a:noFill/>
-          </a:ln>
-        </p:spPr>
-        <p:style>
-          <a:lnRef idx="1">
-            <a:schemeClr val="accent1"/>
-          </a:lnRef>
-          <a:fillRef idx="3">
-            <a:schemeClr val="accent1"/>
-          </a:fillRef>
-          <a:effectRef idx="2">
-            <a:schemeClr val="accent1"/>
-          </a:effectRef>
-          <a:fontRef idx="minor">
-            <a:schemeClr val="lt1"/>
-          </a:fontRef>
-        </p:style>
-        <p:txBody>
-          <a:bodyPr rtlCol="0" anchor="ctr"/>
-          <a:lstStyle/>
-          <a:p>
-            <a:pPr algn="ctr"/>
-            <a:endParaRPr>
-              <a:solidFill>
-                <a:prstClr val="white"/>
-              </a:solidFill>
-              <a:latin typeface="Candara" panose="020E0502030303020204" pitchFamily="34" charset="0"/>
-            </a:endParaRPr>
-          </a:p>
-        </p:txBody>
-      </p:sp>
-      <p:sp>
-        <p:nvSpPr>
-          <p:cNvPr id="16" name="TextBox 15"/>
-          <p:cNvSpPr txBox="1"/>
-          <p:nvPr/>
-        </p:nvSpPr>
-        <p:spPr>
-          <a:xfrm>
-            <a:off x="7684127" y="3000793"/>
-            <a:ext cx="3321358" cy="307777"/>
-          </a:xfrm>
-          <a:prstGeom prst="rect">
-            <a:avLst/>
-          </a:prstGeom>
-          <a:noFill/>
-        </p:spPr>
-        <p:txBody>
-          <a:bodyPr wrap="none">
-            <a:spAutoFit/>
-          </a:bodyPr>
-          <a:lstStyle/>
-          <a:p>
-            <a:r>
-              <a:rPr sz="1400">
-                <a:solidFill>
-                  <a:srgbClr val="C8E6DC"/>
-                </a:solidFill>
-                <a:latin typeface="Candara" panose="020E0502030303020204" pitchFamily="34" charset="0"/>
-              </a:rPr>
-              <a:t>✓ Web-based — no proprietary hardware</a:t>
-            </a:r>
-          </a:p>
-        </p:txBody>
-      </p:sp>
-      <p:sp>
-        <p:nvSpPr>
-          <p:cNvPr id="17" name="TextBox 16"/>
-          <p:cNvSpPr txBox="1"/>
-          <p:nvPr/>
-        </p:nvSpPr>
-        <p:spPr>
-          <a:xfrm>
-            <a:off x="7684126" y="3457993"/>
-            <a:ext cx="2827634" cy="307777"/>
-          </a:xfrm>
-          <a:prstGeom prst="rect">
-            <a:avLst/>
-          </a:prstGeom>
-          <a:noFill/>
-        </p:spPr>
-        <p:txBody>
-          <a:bodyPr wrap="none">
-            <a:spAutoFit/>
-          </a:bodyPr>
-          <a:lstStyle/>
-          <a:p>
-            <a:r>
-              <a:rPr sz="1400">
-                <a:solidFill>
-                  <a:srgbClr val="C8E6DC"/>
-                </a:solidFill>
-                <a:latin typeface="Candara" panose="020E0502030303020204" pitchFamily="34" charset="0"/>
-              </a:rPr>
-              <a:t>✓ Real-time via SignalR WebSocket</a:t>
-            </a:r>
-          </a:p>
-        </p:txBody>
-      </p:sp>
-      <p:sp>
-        <p:nvSpPr>
-          <p:cNvPr id="18" name="TextBox 17"/>
-          <p:cNvSpPr txBox="1"/>
-          <p:nvPr/>
-        </p:nvSpPr>
-        <p:spPr>
-          <a:xfrm>
-            <a:off x="7684126" y="3915193"/>
-            <a:ext cx="2731838" cy="307777"/>
-          </a:xfrm>
-          <a:prstGeom prst="rect">
-            <a:avLst/>
-          </a:prstGeom>
-          <a:noFill/>
-        </p:spPr>
-        <p:txBody>
-          <a:bodyPr wrap="none">
-            <a:spAutoFit/>
-          </a:bodyPr>
-          <a:lstStyle/>
-          <a:p>
-            <a:r>
-              <a:rPr sz="1400">
-                <a:solidFill>
-                  <a:srgbClr val="C8E6DC"/>
-                </a:solidFill>
-                <a:latin typeface="Candara" panose="020E0502030303020204" pitchFamily="34" charset="0"/>
-              </a:rPr>
-              <a:t>✓ Historical storage in SQL Server</a:t>
-            </a:r>
-          </a:p>
-        </p:txBody>
-      </p:sp>
-      <p:sp>
-        <p:nvSpPr>
-          <p:cNvPr id="19" name="TextBox 18"/>
-          <p:cNvSpPr txBox="1"/>
-          <p:nvPr/>
-        </p:nvSpPr>
-        <p:spPr>
-          <a:xfrm>
-            <a:off x="7684127" y="4372393"/>
-            <a:ext cx="2885726" cy="307777"/>
-          </a:xfrm>
-          <a:prstGeom prst="rect">
-            <a:avLst/>
-          </a:prstGeom>
-          <a:noFill/>
-        </p:spPr>
-        <p:txBody>
-          <a:bodyPr wrap="none">
-            <a:spAutoFit/>
-          </a:bodyPr>
-          <a:lstStyle/>
-          <a:p>
-            <a:r>
-              <a:rPr sz="1400">
-                <a:solidFill>
-                  <a:srgbClr val="C8E6DC"/>
-                </a:solidFill>
-                <a:latin typeface="Candara" panose="020E0502030303020204" pitchFamily="34" charset="0"/>
-              </a:rPr>
-              <a:t>✓ Remote access from any browser</a:t>
-            </a:r>
-          </a:p>
-        </p:txBody>
-      </p:sp>
-      <p:sp>
-        <p:nvSpPr>
-          <p:cNvPr id="20" name="TextBox 19"/>
-          <p:cNvSpPr txBox="1"/>
-          <p:nvPr/>
-        </p:nvSpPr>
-        <p:spPr>
-          <a:xfrm>
-            <a:off x="7684126" y="4829593"/>
-            <a:ext cx="2828018" cy="307777"/>
-          </a:xfrm>
-          <a:prstGeom prst="rect">
-            <a:avLst/>
-          </a:prstGeom>
-          <a:noFill/>
-        </p:spPr>
-        <p:txBody>
-          <a:bodyPr wrap="none">
-            <a:spAutoFit/>
-          </a:bodyPr>
-          <a:lstStyle/>
-          <a:p>
-            <a:r>
-              <a:rPr sz="1400" dirty="0">
-                <a:solidFill>
-                  <a:srgbClr val="C8E6DC"/>
-                </a:solidFill>
-                <a:latin typeface="Candara" panose="020E0502030303020204" pitchFamily="34" charset="0"/>
-              </a:rPr>
-              <a:t>✓ Cost-effective open-source stack</a:t>
-            </a:r>
-          </a:p>
-        </p:txBody>
-      </p:sp>
-      <p:sp>
-        <p:nvSpPr>
-          <p:cNvPr id="21" name="TextBox 20"/>
-          <p:cNvSpPr txBox="1"/>
-          <p:nvPr/>
-        </p:nvSpPr>
-        <p:spPr>
-          <a:xfrm>
-            <a:off x="7684127" y="5286793"/>
-            <a:ext cx="3174267" cy="307777"/>
-          </a:xfrm>
-          <a:prstGeom prst="rect">
-            <a:avLst/>
-          </a:prstGeom>
-          <a:noFill/>
-        </p:spPr>
-        <p:txBody>
-          <a:bodyPr wrap="none">
-            <a:spAutoFit/>
-          </a:bodyPr>
-          <a:lstStyle/>
-          <a:p>
-            <a:r>
-              <a:rPr sz="1400">
-                <a:solidFill>
-                  <a:srgbClr val="C8E6DC"/>
-                </a:solidFill>
-                <a:latin typeface="Candara" panose="020E0502030303020204" pitchFamily="34" charset="0"/>
-              </a:rPr>
-              <a:t>✓ Arduino, ESP32, Raspberry Pi support</a:t>
-            </a:r>
           </a:p>
         </p:txBody>
       </p:sp>
@@ -18211,7 +17614,7 @@
           <a:lstStyle/>
           <a:p>
             <a:r>
-              <a:rPr b="1">
+              <a:rPr b="1" dirty="0">
                 <a:solidFill>
                   <a:srgbClr val="FFFFFF"/>
                 </a:solidFill>
@@ -18222,7 +17625,7 @@
           </a:p>
           <a:p>
             <a:r>
-              <a:rPr sz="1400">
+              <a:rPr sz="1400" dirty="0">
                 <a:solidFill>
                   <a:srgbClr val="B4C8BE"/>
                 </a:solidFill>
@@ -18681,7 +18084,7 @@
           <a:lstStyle/>
           <a:p>
             <a:r>
-              <a:rPr b="1">
+              <a:rPr b="1" dirty="0">
                 <a:solidFill>
                   <a:srgbClr val="FFFFFF"/>
                 </a:solidFill>
@@ -18692,7 +18095,7 @@
           </a:p>
           <a:p>
             <a:r>
-              <a:rPr sz="1400">
+              <a:rPr sz="1400" dirty="0">
                 <a:solidFill>
                   <a:srgbClr val="B4C8BE"/>
                 </a:solidFill>
@@ -18867,25 +18270,7 @@
                 </a:solidFill>
                 <a:latin typeface="Candara" panose="020E0502030303020204" pitchFamily="34" charset="0"/>
               </a:rPr>
-              <a:t>End-to-end pipeline: Device → MQTT → Backend → </a:t>
-            </a:r>
-            <a:r>
-              <a:rPr sz="1600" dirty="0" err="1">
-                <a:solidFill>
-                  <a:srgbClr val="B4C8BE"/>
-                </a:solidFill>
-                <a:latin typeface="Candara" panose="020E0502030303020204" pitchFamily="34" charset="0"/>
-              </a:rPr>
-              <a:t>SignalR</a:t>
-            </a:r>
-            <a:r>
-              <a:rPr sz="1600" dirty="0">
-                <a:solidFill>
-                  <a:srgbClr val="B4C8BE"/>
-                </a:solidFill>
-                <a:latin typeface="Candara" panose="020E0502030303020204" pitchFamily="34" charset="0"/>
-              </a:rPr>
-              <a:t> → UI</a:t>
+              <a:t>End-to-end pipeline: Device → MQTT → Backend → SignalR → UI</a:t>
             </a:r>
           </a:p>
         </p:txBody>
@@ -19170,7 +18555,7 @@
           <a:lstStyle/>
           <a:p>
             <a:r>
-              <a:rPr b="1">
+              <a:rPr b="1" dirty="0">
                 <a:solidFill>
                   <a:srgbClr val="FFFFFF"/>
                 </a:solidFill>
@@ -19181,7 +18566,7 @@
           </a:p>
           <a:p>
             <a:r>
-              <a:rPr sz="1400">
+              <a:rPr sz="1400" dirty="0">
                 <a:solidFill>
                   <a:srgbClr val="B4C8BE"/>
                 </a:solidFill>
@@ -19593,8 +18978,8 @@
         </p:nvSpPr>
         <p:spPr>
           <a:xfrm>
-            <a:off x="2169442" y="3305879"/>
-            <a:ext cx="1725152" cy="1169551"/>
+            <a:off x="668070" y="1886152"/>
+            <a:ext cx="1725152" cy="1674754"/>
           </a:xfrm>
           <a:prstGeom prst="rect">
             <a:avLst/>
@@ -19607,6 +18992,11 @@
           </a:bodyPr>
           <a:lstStyle/>
           <a:p>
+            <a:pPr>
+              <a:lnSpc>
+                <a:spcPct val="150000"/>
+              </a:lnSpc>
+            </a:pPr>
             <a:r>
               <a:rPr sz="1400" b="1" dirty="0">
                 <a:solidFill>
@@ -19618,6 +19008,11 @@
             </a:r>
           </a:p>
           <a:p>
+            <a:pPr>
+              <a:lnSpc>
+                <a:spcPct val="150000"/>
+              </a:lnSpc>
+            </a:pPr>
             <a:r>
               <a:rPr sz="1400" dirty="0">
                 <a:solidFill>
@@ -19629,6 +19024,11 @@
             </a:r>
           </a:p>
           <a:p>
+            <a:pPr>
+              <a:lnSpc>
+                <a:spcPct val="150000"/>
+              </a:lnSpc>
+            </a:pPr>
             <a:r>
               <a:rPr sz="1400" dirty="0">
                 <a:solidFill>
@@ -19640,6 +19040,11 @@
             </a:r>
           </a:p>
           <a:p>
+            <a:pPr>
+              <a:lnSpc>
+                <a:spcPct val="150000"/>
+              </a:lnSpc>
+            </a:pPr>
             <a:r>
               <a:rPr sz="1400" dirty="0">
                 <a:solidFill>
@@ -19651,6 +19056,11 @@
             </a:r>
           </a:p>
           <a:p>
+            <a:pPr>
+              <a:lnSpc>
+                <a:spcPct val="150000"/>
+              </a:lnSpc>
+            </a:pPr>
             <a:r>
               <a:rPr sz="1400" dirty="0">
                 <a:solidFill>
@@ -19671,8 +19081,8 @@
         </p:nvSpPr>
         <p:spPr>
           <a:xfrm>
-            <a:off x="3894594" y="1637440"/>
-            <a:ext cx="1576072" cy="1169551"/>
+            <a:off x="2685728" y="2247781"/>
+            <a:ext cx="1576072" cy="1673343"/>
           </a:xfrm>
           <a:prstGeom prst="rect">
             <a:avLst/>
@@ -19685,6 +19095,11 @@
           </a:bodyPr>
           <a:lstStyle/>
           <a:p>
+            <a:pPr>
+              <a:lnSpc>
+                <a:spcPct val="150000"/>
+              </a:lnSpc>
+            </a:pPr>
             <a:r>
               <a:rPr sz="1400" b="1" dirty="0">
                 <a:solidFill>
@@ -19696,6 +19111,11 @@
             </a:r>
           </a:p>
           <a:p>
+            <a:pPr>
+              <a:lnSpc>
+                <a:spcPct val="150000"/>
+              </a:lnSpc>
+            </a:pPr>
             <a:r>
               <a:rPr sz="1400" dirty="0">
                 <a:solidFill>
@@ -19707,6 +19127,11 @@
             </a:r>
           </a:p>
           <a:p>
+            <a:pPr>
+              <a:lnSpc>
+                <a:spcPct val="150000"/>
+              </a:lnSpc>
+            </a:pPr>
             <a:r>
               <a:rPr sz="1400" dirty="0" err="1">
                 <a:solidFill>
@@ -19727,6 +19152,11 @@
             </a:r>
           </a:p>
           <a:p>
+            <a:pPr>
+              <a:lnSpc>
+                <a:spcPct val="150000"/>
+              </a:lnSpc>
+            </a:pPr>
             <a:r>
               <a:rPr sz="1400" dirty="0">
                 <a:solidFill>
@@ -19738,6 +19168,11 @@
             </a:r>
           </a:p>
           <a:p>
+            <a:pPr>
+              <a:lnSpc>
+                <a:spcPct val="150000"/>
+              </a:lnSpc>
+            </a:pPr>
             <a:r>
               <a:rPr sz="1400" dirty="0">
                 <a:solidFill>
@@ -19758,8 +19193,8 @@
         </p:nvSpPr>
         <p:spPr>
           <a:xfrm>
-            <a:off x="6226036" y="1637440"/>
-            <a:ext cx="1396536" cy="1169551"/>
+            <a:off x="4846812" y="2723529"/>
+            <a:ext cx="1396536" cy="1674754"/>
           </a:xfrm>
           <a:prstGeom prst="rect">
             <a:avLst/>
@@ -19772,6 +19207,11 @@
           </a:bodyPr>
           <a:lstStyle/>
           <a:p>
+            <a:pPr>
+              <a:lnSpc>
+                <a:spcPct val="150000"/>
+              </a:lnSpc>
+            </a:pPr>
             <a:r>
               <a:rPr sz="1400" b="1" dirty="0">
                 <a:solidFill>
@@ -19783,6 +19223,11 @@
             </a:r>
           </a:p>
           <a:p>
+            <a:pPr>
+              <a:lnSpc>
+                <a:spcPct val="150000"/>
+              </a:lnSpc>
+            </a:pPr>
             <a:r>
               <a:rPr sz="1400" dirty="0">
                 <a:solidFill>
@@ -19794,6 +19239,11 @@
             </a:r>
           </a:p>
           <a:p>
+            <a:pPr>
+              <a:lnSpc>
+                <a:spcPct val="150000"/>
+              </a:lnSpc>
+            </a:pPr>
             <a:r>
               <a:rPr sz="1400" dirty="0">
                 <a:solidFill>
@@ -19805,26 +19255,27 @@
             </a:r>
           </a:p>
           <a:p>
-            <a:r>
-              <a:rPr sz="1400" dirty="0" err="1">
+            <a:pPr>
+              <a:lnSpc>
+                <a:spcPct val="150000"/>
+              </a:lnSpc>
+            </a:pPr>
+            <a:r>
+              <a:rPr sz="1400" dirty="0">
                 <a:solidFill>
                   <a:srgbClr val="FFFFFF"/>
                 </a:solidFill>
                 <a:latin typeface="Candara" panose="020E0502030303020204" pitchFamily="34" charset="0"/>
               </a:rPr>
-              <a:t>SignalR</a:t>
-            </a:r>
-            <a:r>
-              <a:rPr sz="1400" dirty="0">
-                <a:solidFill>
-                  <a:srgbClr val="FFFFFF"/>
-                </a:solidFill>
-                <a:latin typeface="Candara" panose="020E0502030303020204" pitchFamily="34" charset="0"/>
-              </a:rPr>
-              <a:t> Hub</a:t>
-            </a:r>
-          </a:p>
-          <a:p>
+              <a:t>SignalR Hub</a:t>
+            </a:r>
+          </a:p>
+          <a:p>
+            <a:pPr>
+              <a:lnSpc>
+                <a:spcPct val="150000"/>
+              </a:lnSpc>
+            </a:pPr>
             <a:r>
               <a:rPr sz="1400" dirty="0">
                 <a:solidFill>
@@ -19845,8 +19296,8 @@
         </p:nvSpPr>
         <p:spPr>
           <a:xfrm>
-            <a:off x="7984156" y="3026256"/>
-            <a:ext cx="1186543" cy="738664"/>
+            <a:off x="6983381" y="3298671"/>
+            <a:ext cx="1186543" cy="1028423"/>
           </a:xfrm>
           <a:prstGeom prst="rect">
             <a:avLst/>
@@ -19859,6 +19310,11 @@
           </a:bodyPr>
           <a:lstStyle/>
           <a:p>
+            <a:pPr>
+              <a:lnSpc>
+                <a:spcPct val="150000"/>
+              </a:lnSpc>
+            </a:pPr>
             <a:r>
               <a:rPr sz="1400" b="1" dirty="0">
                 <a:solidFill>
@@ -19870,6 +19326,11 @@
             </a:r>
           </a:p>
           <a:p>
+            <a:pPr>
+              <a:lnSpc>
+                <a:spcPct val="150000"/>
+              </a:lnSpc>
+            </a:pPr>
             <a:r>
               <a:rPr sz="1400" dirty="0">
                 <a:solidFill>
@@ -19881,6 +19342,11 @@
             </a:r>
           </a:p>
           <a:p>
+            <a:pPr>
+              <a:lnSpc>
+                <a:spcPct val="150000"/>
+              </a:lnSpc>
+            </a:pPr>
             <a:r>
               <a:rPr sz="1400" dirty="0">
                 <a:solidFill>
@@ -19901,8 +19367,8 @@
         </p:nvSpPr>
         <p:spPr>
           <a:xfrm>
-            <a:off x="6332791" y="4525314"/>
-            <a:ext cx="1647823" cy="954107"/>
+            <a:off x="8597398" y="3952823"/>
+            <a:ext cx="1647823" cy="1351588"/>
           </a:xfrm>
           <a:prstGeom prst="rect">
             <a:avLst/>
@@ -19915,6 +19381,11 @@
           </a:bodyPr>
           <a:lstStyle/>
           <a:p>
+            <a:pPr>
+              <a:lnSpc>
+                <a:spcPct val="150000"/>
+              </a:lnSpc>
+            </a:pPr>
             <a:r>
               <a:rPr sz="1400" b="1" dirty="0">
                 <a:solidFill>
@@ -19926,15 +19397,27 @@
             </a:r>
           </a:p>
           <a:p>
-            <a:r>
-              <a:rPr sz="1400" dirty="0" err="1">
+            <a:pPr>
+              <a:lnSpc>
+                <a:spcPct val="150000"/>
+              </a:lnSpc>
+            </a:pPr>
+            <a:r>
+              <a:rPr sz="1400" dirty="0">
                 <a:solidFill>
                   <a:srgbClr val="FFFFFF"/>
                 </a:solidFill>
                 <a:latin typeface="Candara" panose="020E0502030303020204" pitchFamily="34" charset="0"/>
               </a:rPr>
-              <a:t>SignalR</a:t>
-            </a:r>
+              <a:t>SignalR WebSocket</a:t>
+            </a:r>
+          </a:p>
+          <a:p>
+            <a:pPr>
+              <a:lnSpc>
+                <a:spcPct val="150000"/>
+              </a:lnSpc>
+            </a:pPr>
             <a:r>
               <a:rPr sz="1400" dirty="0">
                 <a:solidFill>
@@ -19942,21 +19425,15 @@
                 </a:solidFill>
                 <a:latin typeface="Candara" panose="020E0502030303020204" pitchFamily="34" charset="0"/>
               </a:rPr>
-              <a:t> WebSocket</a:t>
-            </a:r>
-          </a:p>
-          <a:p>
-            <a:r>
-              <a:rPr sz="1400" dirty="0">
-                <a:solidFill>
-                  <a:srgbClr val="FFFFFF"/>
-                </a:solidFill>
-                <a:latin typeface="Candara" panose="020E0502030303020204" pitchFamily="34" charset="0"/>
-              </a:rPr>
               <a:t>Server Push</a:t>
             </a:r>
           </a:p>
           <a:p>
+            <a:pPr>
+              <a:lnSpc>
+                <a:spcPct val="150000"/>
+              </a:lnSpc>
+            </a:pPr>
             <a:r>
               <a:rPr sz="1400" dirty="0">
                 <a:solidFill>
@@ -19977,8 +19454,8 @@
         </p:nvSpPr>
         <p:spPr>
           <a:xfrm>
-            <a:off x="4073328" y="4628628"/>
-            <a:ext cx="1218603" cy="954107"/>
+            <a:off x="10326297" y="4628617"/>
+            <a:ext cx="1218603" cy="1351588"/>
           </a:xfrm>
           <a:prstGeom prst="rect">
             <a:avLst/>
@@ -19991,6 +19468,11 @@
           </a:bodyPr>
           <a:lstStyle/>
           <a:p>
+            <a:pPr>
+              <a:lnSpc>
+                <a:spcPct val="150000"/>
+              </a:lnSpc>
+            </a:pPr>
             <a:r>
               <a:rPr sz="1400" b="1" dirty="0">
                 <a:solidFill>
@@ -20002,6 +19484,11 @@
             </a:r>
           </a:p>
           <a:p>
+            <a:pPr>
+              <a:lnSpc>
+                <a:spcPct val="150000"/>
+              </a:lnSpc>
+            </a:pPr>
             <a:r>
               <a:rPr sz="1400" dirty="0">
                 <a:solidFill>
@@ -20013,26 +19500,27 @@
             </a:r>
           </a:p>
           <a:p>
-            <a:r>
-              <a:rPr sz="1400" dirty="0" err="1">
+            <a:pPr>
+              <a:lnSpc>
+                <a:spcPct val="150000"/>
+              </a:lnSpc>
+            </a:pPr>
+            <a:r>
+              <a:rPr sz="1400" dirty="0">
                 <a:solidFill>
                   <a:srgbClr val="FFFFFF"/>
                 </a:solidFill>
                 <a:latin typeface="Candara" panose="020E0502030303020204" pitchFamily="34" charset="0"/>
               </a:rPr>
-              <a:t>SignalR</a:t>
-            </a:r>
-            <a:r>
-              <a:rPr sz="1400" dirty="0">
-                <a:solidFill>
-                  <a:srgbClr val="FFFFFF"/>
-                </a:solidFill>
-                <a:latin typeface="Candara" panose="020E0502030303020204" pitchFamily="34" charset="0"/>
-              </a:rPr>
-              <a:t> Client</a:t>
-            </a:r>
-          </a:p>
-          <a:p>
+              <a:t>SignalR Client</a:t>
+            </a:r>
+          </a:p>
+          <a:p>
+            <a:pPr>
+              <a:lnSpc>
+                <a:spcPct val="150000"/>
+              </a:lnSpc>
+            </a:pPr>
             <a:r>
               <a:rPr sz="1400" dirty="0">
                 <a:solidFill>
@@ -20074,25 +19562,7 @@
                 </a:solidFill>
                 <a:latin typeface="Candara" panose="020E0502030303020204" pitchFamily="34" charset="0"/>
               </a:rPr>
-              <a:t>⚡ Real-time via </a:t>
-            </a:r>
-            <a:r>
-              <a:rPr sz="1400" dirty="0" err="1">
-                <a:solidFill>
-                  <a:srgbClr val="00C896"/>
-                </a:solidFill>
-                <a:latin typeface="Candara" panose="020E0502030303020204" pitchFamily="34" charset="0"/>
-              </a:rPr>
-              <a:t>SignalR</a:t>
-            </a:r>
-            <a:r>
-              <a:rPr sz="1400" dirty="0">
-                <a:solidFill>
-                  <a:srgbClr val="00C896"/>
-                </a:solidFill>
-                <a:latin typeface="Candara" panose="020E0502030303020204" pitchFamily="34" charset="0"/>
-              </a:rPr>
-              <a:t> WebSocket — updates in &lt;2 seconds</a:t>
+              <a:t>⚡ Real-time via SignalR WebSocket — updates in &lt;2 seconds</a:t>
             </a:r>
           </a:p>
         </p:txBody>
@@ -25114,7 +24584,7 @@
           <a:p>
             <a:pPr algn="r" defTabSz="380893"/>
             <a:r>
-              <a:rPr sz="1500" b="1">
+              <a:rPr sz="1500" b="1" dirty="0">
                 <a:solidFill>
                   <a:srgbClr val="00C896"/>
                 </a:solidFill>
@@ -25126,7 +24596,7 @@
           <a:p>
             <a:pPr algn="r" defTabSz="380893"/>
             <a:r>
-              <a:rPr sz="1500">
+              <a:rPr sz="1500" dirty="0">
                 <a:solidFill>
                   <a:srgbClr val="B4C8BE"/>
                 </a:solidFill>
@@ -25922,7 +25392,7 @@
           <a:p>
             <a:pPr defTabSz="380893"/>
             <a:r>
-              <a:rPr sz="1166" b="1">
+              <a:rPr sz="1166" b="1" dirty="0">
                 <a:solidFill>
                   <a:srgbClr val="00C896"/>
                 </a:solidFill>
@@ -26158,7 +25628,7 @@
           <a:p>
             <a:pPr defTabSz="380893"/>
             <a:r>
-              <a:rPr sz="1041" i="1">
+              <a:rPr sz="1041" i="1" dirty="0">
                 <a:solidFill>
                   <a:srgbClr val="AFC6BC"/>
                 </a:solidFill>
@@ -27854,7 +27324,7 @@
           <a:p>
             <a:pPr algn="ctr" defTabSz="380893"/>
             <a:r>
-              <a:rPr sz="858" b="1">
+              <a:rPr sz="858" b="1" dirty="0">
                 <a:solidFill>
                   <a:srgbClr val="F2F8F5"/>
                 </a:solidFill>
@@ -28096,7 +27566,7 @@
           <a:p>
             <a:pPr algn="ctr" defTabSz="380893"/>
             <a:r>
-              <a:rPr sz="858" b="1">
+              <a:rPr sz="858" b="1" dirty="0">
                 <a:solidFill>
                   <a:srgbClr val="F2F8F5"/>
                 </a:solidFill>
@@ -29156,7 +28626,7 @@
           <a:p>
             <a:pPr defTabSz="380893"/>
             <a:r>
-              <a:rPr sz="875">
+              <a:rPr sz="875" dirty="0">
                 <a:solidFill>
                   <a:srgbClr val="AFC6BC"/>
                 </a:solidFill>
